--- a/Cource_LAB_Create a Create a Docker on Ubuntu 20.04.pptx
+++ b/Cource_LAB_Create a Create a Docker on Ubuntu 20.04.pptx
@@ -227,7 +227,7 @@
           <a:p>
             <a:fld id="{43DA0A24-8F73-440D-9695-CACB93E3DC8C}" type="datetimeFigureOut">
               <a:rPr lang="en-US" smtClean="0"/>
-              <a:t>9/15/2025</a:t>
+              <a:t>9/18/2026</a:t>
             </a:fld>
             <a:endParaRPr lang="en-US"/>
           </a:p>
@@ -2525,7 +2525,7 @@
           <a:p>
             <a:fld id="{48A87A34-81AB-432B-8DAE-1953F412C126}" type="datetimeFigureOut">
               <a:rPr lang="en-US" smtClean="0"/>
-              <a:t>9/15/2025</a:t>
+              <a:t>9/18/2026</a:t>
             </a:fld>
             <a:endParaRPr lang="en-US" dirty="0"/>
           </a:p>
@@ -2695,7 +2695,7 @@
           <a:p>
             <a:fld id="{48A87A34-81AB-432B-8DAE-1953F412C126}" type="datetimeFigureOut">
               <a:rPr lang="en-US" smtClean="0"/>
-              <a:t>9/15/2025</a:t>
+              <a:t>9/18/2026</a:t>
             </a:fld>
             <a:endParaRPr lang="en-US" dirty="0"/>
           </a:p>
@@ -2875,7 +2875,7 @@
           <a:p>
             <a:fld id="{48A87A34-81AB-432B-8DAE-1953F412C126}" type="datetimeFigureOut">
               <a:rPr lang="en-US" smtClean="0"/>
-              <a:t>9/15/2025</a:t>
+              <a:t>9/18/2026</a:t>
             </a:fld>
             <a:endParaRPr lang="en-US" dirty="0"/>
           </a:p>
@@ -3045,7 +3045,7 @@
           <a:p>
             <a:fld id="{48A87A34-81AB-432B-8DAE-1953F412C126}" type="datetimeFigureOut">
               <a:rPr lang="en-US" smtClean="0"/>
-              <a:t>9/15/2025</a:t>
+              <a:t>9/18/2026</a:t>
             </a:fld>
             <a:endParaRPr lang="en-US" dirty="0"/>
           </a:p>
@@ -3291,7 +3291,7 @@
           <a:p>
             <a:fld id="{48A87A34-81AB-432B-8DAE-1953F412C126}" type="datetimeFigureOut">
               <a:rPr lang="en-US" smtClean="0"/>
-              <a:t>9/15/2025</a:t>
+              <a:t>9/18/2026</a:t>
             </a:fld>
             <a:endParaRPr lang="en-US" dirty="0"/>
           </a:p>
@@ -3523,7 +3523,7 @@
           <a:p>
             <a:fld id="{48A87A34-81AB-432B-8DAE-1953F412C126}" type="datetimeFigureOut">
               <a:rPr lang="en-US" smtClean="0"/>
-              <a:t>9/15/2025</a:t>
+              <a:t>9/18/2026</a:t>
             </a:fld>
             <a:endParaRPr lang="en-US" dirty="0"/>
           </a:p>
@@ -3890,7 +3890,7 @@
           <a:p>
             <a:fld id="{48A87A34-81AB-432B-8DAE-1953F412C126}" type="datetimeFigureOut">
               <a:rPr lang="en-US" smtClean="0"/>
-              <a:t>9/15/2025</a:t>
+              <a:t>9/18/2026</a:t>
             </a:fld>
             <a:endParaRPr lang="en-US" dirty="0"/>
           </a:p>
@@ -4008,7 +4008,7 @@
           <a:p>
             <a:fld id="{48A87A34-81AB-432B-8DAE-1953F412C126}" type="datetimeFigureOut">
               <a:rPr lang="en-US" smtClean="0"/>
-              <a:t>9/15/2025</a:t>
+              <a:t>9/18/2026</a:t>
             </a:fld>
             <a:endParaRPr lang="en-US" dirty="0"/>
           </a:p>
@@ -4103,7 +4103,7 @@
           <a:p>
             <a:fld id="{48A87A34-81AB-432B-8DAE-1953F412C126}" type="datetimeFigureOut">
               <a:rPr lang="en-US" smtClean="0"/>
-              <a:t>9/15/2025</a:t>
+              <a:t>9/18/2026</a:t>
             </a:fld>
             <a:endParaRPr lang="en-US" dirty="0"/>
           </a:p>
@@ -4380,7 +4380,7 @@
           <a:p>
             <a:fld id="{48A87A34-81AB-432B-8DAE-1953F412C126}" type="datetimeFigureOut">
               <a:rPr lang="en-US" smtClean="0"/>
-              <a:t>9/15/2025</a:t>
+              <a:t>9/18/2026</a:t>
             </a:fld>
             <a:endParaRPr lang="en-US" dirty="0"/>
           </a:p>
@@ -4633,7 +4633,7 @@
           <a:p>
             <a:fld id="{48A87A34-81AB-432B-8DAE-1953F412C126}" type="datetimeFigureOut">
               <a:rPr lang="en-US" smtClean="0"/>
-              <a:t>9/15/2025</a:t>
+              <a:t>9/18/2026</a:t>
             </a:fld>
             <a:endParaRPr lang="en-US" dirty="0"/>
           </a:p>
@@ -4847,7 +4847,7 @@
             <a:fld id="{48A87A34-81AB-432B-8DAE-1953F412C126}" type="datetimeFigureOut">
               <a:rPr lang="en-US" smtClean="0"/>
               <a:pPr/>
-              <a:t>9/15/2025</a:t>
+              <a:t>9/18/2026</a:t>
             </a:fld>
             <a:endParaRPr lang="en-US" dirty="0"/>
           </a:p>
@@ -6636,95 +6636,6 @@
           </p:txBody>
         </p:sp>
       </p:grpSp>
-      <p:sp>
-        <p:nvSpPr>
-          <p:cNvPr id="22" name="Rectangle 21"/>
-          <p:cNvSpPr/>
-          <p:nvPr/>
-        </p:nvSpPr>
-        <p:spPr>
-          <a:xfrm>
-            <a:off x="8911525" y="5781051"/>
-            <a:ext cx="3485015" cy="276999"/>
-          </a:xfrm>
-          <a:prstGeom prst="rect">
-            <a:avLst/>
-          </a:prstGeom>
-        </p:spPr>
-        <p:txBody>
-          <a:bodyPr wrap="square">
-            <a:spAutoFit/>
-          </a:bodyPr>
-          <a:lstStyle/>
-          <a:p>
-            <a:r>
-              <a:rPr lang="en-US" sz="1200" dirty="0"/>
-              <a:t>https://www.youtube.com/@AmelOline/videos</a:t>
-            </a:r>
-          </a:p>
-        </p:txBody>
-      </p:sp>
-      <p:sp>
-        <p:nvSpPr>
-          <p:cNvPr id="23" name="Rectangle 22"/>
-          <p:cNvSpPr/>
-          <p:nvPr/>
-        </p:nvSpPr>
-        <p:spPr>
-          <a:xfrm>
-            <a:off x="10027402" y="5596385"/>
-            <a:ext cx="2164597" cy="276999"/>
-          </a:xfrm>
-          <a:prstGeom prst="rect">
-            <a:avLst/>
-          </a:prstGeom>
-        </p:spPr>
-        <p:txBody>
-          <a:bodyPr wrap="square">
-            <a:spAutoFit/>
-          </a:bodyPr>
-          <a:lstStyle/>
-          <a:p>
-            <a:r>
-              <a:rPr lang="en-US" sz="1200" dirty="0"/>
-              <a:t>https://github.com/siagianp</a:t>
-            </a:r>
-          </a:p>
-        </p:txBody>
-      </p:sp>
-      <p:sp>
-        <p:nvSpPr>
-          <p:cNvPr id="2" name="Rectangle 1"/>
-          <p:cNvSpPr/>
-          <p:nvPr/>
-        </p:nvSpPr>
-        <p:spPr>
-          <a:xfrm>
-            <a:off x="7609668" y="5965717"/>
-            <a:ext cx="4889592" cy="276999"/>
-          </a:xfrm>
-          <a:prstGeom prst="rect">
-            <a:avLst/>
-          </a:prstGeom>
-        </p:spPr>
-        <p:txBody>
-          <a:bodyPr wrap="square">
-            <a:spAutoFit/>
-          </a:bodyPr>
-          <a:lstStyle/>
-          <a:p>
-            <a:r>
-              <a:rPr lang="en-US" sz="1200" dirty="0"/>
-              <a:t>https</a:t>
-            </a:r>
-            <a:r>
-              <a:rPr lang="en-US" sz="1200" dirty="0" smtClean="0"/>
-              <a:t>://github.com/amelcharolinesgn2/IoT_simulator-mqtt-NodeRed</a:t>
-            </a:r>
-            <a:endParaRPr lang="en-US" sz="1200" dirty="0"/>
-          </a:p>
-        </p:txBody>
-      </p:sp>
       <p:pic>
         <p:nvPicPr>
           <p:cNvPr id="4" name="Picture 3"/>
@@ -7008,84 +6919,6 @@
               </a:rPr>
               <a:t>Kubernetes</a:t>
             </a:r>
-            <a:endParaRPr lang="en-US" sz="4400" dirty="0" smtClean="0">
-              <a:solidFill>
-                <a:srgbClr val="0070C0"/>
-              </a:solidFill>
-            </a:endParaRPr>
-          </a:p>
-        </p:txBody>
-      </p:sp>
-      <p:sp>
-        <p:nvSpPr>
-          <p:cNvPr id="3" name="Rectangle 2"/>
-          <p:cNvSpPr/>
-          <p:nvPr/>
-        </p:nvSpPr>
-        <p:spPr>
-          <a:xfrm>
-            <a:off x="8203920" y="6150383"/>
-            <a:ext cx="3988079" cy="276999"/>
-          </a:xfrm>
-          <a:prstGeom prst="rect">
-            <a:avLst/>
-          </a:prstGeom>
-        </p:spPr>
-        <p:txBody>
-          <a:bodyPr wrap="none">
-            <a:spAutoFit/>
-          </a:bodyPr>
-          <a:lstStyle/>
-          <a:p>
-            <a:r>
-              <a:rPr lang="en-US" sz="1200" dirty="0"/>
-              <a:t>https://github.com/amelcharolinesgn2/Cloud-Infrastructures</a:t>
-            </a:r>
-          </a:p>
-        </p:txBody>
-      </p:sp>
-      <p:sp>
-        <p:nvSpPr>
-          <p:cNvPr id="24" name="Rectangle 23"/>
-          <p:cNvSpPr/>
-          <p:nvPr/>
-        </p:nvSpPr>
-        <p:spPr>
-          <a:xfrm>
-            <a:off x="7494493" y="6367868"/>
-            <a:ext cx="4697506" cy="461665"/>
-          </a:xfrm>
-          <a:prstGeom prst="rect">
-            <a:avLst/>
-          </a:prstGeom>
-        </p:spPr>
-        <p:txBody>
-          <a:bodyPr wrap="square">
-            <a:spAutoFit/>
-          </a:bodyPr>
-          <a:lstStyle/>
-          <a:p>
-            <a:r>
-              <a:rPr lang="en-US" sz="1200" dirty="0">
-                <a:hlinkClick r:id="rId8"/>
-              </a:rPr>
-              <a:t>https://</a:t>
-            </a:r>
-            <a:r>
-              <a:rPr lang="en-US" sz="1200" dirty="0" smtClean="0">
-                <a:hlinkClick r:id="rId8"/>
-              </a:rPr>
-              <a:t>github.com/amelcharolinesgn2/ClouD-Infrastructure-SISKA-2025</a:t>
-            </a:r>
-            <a:endParaRPr lang="en-US" sz="1200" dirty="0" smtClean="0"/>
-          </a:p>
-          <a:p>
-            <a:pPr algn="r"/>
-            <a:r>
-              <a:rPr lang="en-US" sz="1200" dirty="0"/>
-              <a:t>https://github.com/amelcharolinesgn2/IoT_app-and-Modules</a:t>
-            </a:r>
-            <a:endParaRPr lang="en-US" sz="1200" dirty="0"/>
           </a:p>
         </p:txBody>
       </p:sp>
@@ -7147,6 +6980,436 @@
                 <a:srgbClr val="0070C0"/>
               </a:solidFill>
             </a:endParaRPr>
+          </a:p>
+        </p:txBody>
+      </p:sp>
+      <p:sp>
+        <p:nvSpPr>
+          <p:cNvPr id="27" name="Rectangle 26"/>
+          <p:cNvSpPr/>
+          <p:nvPr/>
+        </p:nvSpPr>
+        <p:spPr>
+          <a:xfrm>
+            <a:off x="9377124" y="6338624"/>
+            <a:ext cx="2218246" cy="169277"/>
+          </a:xfrm>
+          <a:prstGeom prst="rect">
+            <a:avLst/>
+          </a:prstGeom>
+        </p:spPr>
+        <p:txBody>
+          <a:bodyPr wrap="square">
+            <a:spAutoFit/>
+          </a:bodyPr>
+          <a:lstStyle/>
+          <a:p>
+            <a:r>
+              <a:rPr lang="en-US" sz="500" dirty="0"/>
+              <a:t>https</a:t>
+            </a:r>
+            <a:r>
+              <a:rPr lang="en-US" sz="500" dirty="0" smtClean="0"/>
+              <a:t>://github.com/amelcharolinesgn2/IoT_simulator-mqtt-NodeRed</a:t>
+            </a:r>
+            <a:endParaRPr lang="en-US" sz="500" dirty="0"/>
+          </a:p>
+        </p:txBody>
+      </p:sp>
+      <p:sp>
+        <p:nvSpPr>
+          <p:cNvPr id="28" name="Rectangle 27"/>
+          <p:cNvSpPr/>
+          <p:nvPr/>
+        </p:nvSpPr>
+        <p:spPr>
+          <a:xfrm>
+            <a:off x="10043707" y="5703710"/>
+            <a:ext cx="1301349" cy="150490"/>
+          </a:xfrm>
+          <a:prstGeom prst="rect">
+            <a:avLst/>
+          </a:prstGeom>
+        </p:spPr>
+        <p:txBody>
+          <a:bodyPr wrap="square">
+            <a:spAutoFit/>
+          </a:bodyPr>
+          <a:lstStyle/>
+          <a:p>
+            <a:pPr algn="r"/>
+            <a:r>
+              <a:rPr lang="en-US" sz="378" dirty="0"/>
+              <a:t>https://www.youtube.com/@AmelOline/videos</a:t>
+            </a:r>
+          </a:p>
+        </p:txBody>
+      </p:sp>
+      <p:sp>
+        <p:nvSpPr>
+          <p:cNvPr id="29" name="Rectangle 28"/>
+          <p:cNvSpPr/>
+          <p:nvPr/>
+        </p:nvSpPr>
+        <p:spPr>
+          <a:xfrm>
+            <a:off x="10456278" y="5641410"/>
+            <a:ext cx="879077" cy="150490"/>
+          </a:xfrm>
+          <a:prstGeom prst="rect">
+            <a:avLst/>
+          </a:prstGeom>
+        </p:spPr>
+        <p:txBody>
+          <a:bodyPr wrap="square">
+            <a:spAutoFit/>
+          </a:bodyPr>
+          <a:lstStyle/>
+          <a:p>
+            <a:pPr algn="r"/>
+            <a:r>
+              <a:rPr lang="en-US" sz="378" dirty="0"/>
+              <a:t>https://github.com/siagianp</a:t>
+            </a:r>
+          </a:p>
+        </p:txBody>
+      </p:sp>
+      <p:sp>
+        <p:nvSpPr>
+          <p:cNvPr id="30" name="Rectangle 29"/>
+          <p:cNvSpPr/>
+          <p:nvPr/>
+        </p:nvSpPr>
+        <p:spPr>
+          <a:xfrm>
+            <a:off x="9892975" y="5775309"/>
+            <a:ext cx="1452642" cy="150490"/>
+          </a:xfrm>
+          <a:prstGeom prst="rect">
+            <a:avLst/>
+          </a:prstGeom>
+        </p:spPr>
+        <p:txBody>
+          <a:bodyPr wrap="none">
+            <a:spAutoFit/>
+          </a:bodyPr>
+          <a:lstStyle/>
+          <a:p>
+            <a:pPr algn="r"/>
+            <a:r>
+              <a:rPr lang="en-US" sz="378" dirty="0"/>
+              <a:t>https://github.com/amelcharolinesgn2/Cloud-Infrastructures</a:t>
+            </a:r>
+          </a:p>
+        </p:txBody>
+      </p:sp>
+      <p:sp>
+        <p:nvSpPr>
+          <p:cNvPr id="31" name="Rectangle 30"/>
+          <p:cNvSpPr/>
+          <p:nvPr/>
+        </p:nvSpPr>
+        <p:spPr>
+          <a:xfrm>
+            <a:off x="9626877" y="5839335"/>
+            <a:ext cx="1718740" cy="150490"/>
+          </a:xfrm>
+          <a:prstGeom prst="rect">
+            <a:avLst/>
+          </a:prstGeom>
+        </p:spPr>
+        <p:txBody>
+          <a:bodyPr wrap="none">
+            <a:spAutoFit/>
+          </a:bodyPr>
+          <a:lstStyle/>
+          <a:p>
+            <a:pPr algn="r"/>
+            <a:r>
+              <a:rPr lang="en-US" sz="378" dirty="0"/>
+              <a:t>https://github.com/amelcharolinesgn2/ClouD-Infrastructure-SISKA-2025</a:t>
+            </a:r>
+          </a:p>
+        </p:txBody>
+      </p:sp>
+      <p:sp>
+        <p:nvSpPr>
+          <p:cNvPr id="32" name="Rectangle 31"/>
+          <p:cNvSpPr/>
+          <p:nvPr/>
+        </p:nvSpPr>
+        <p:spPr>
+          <a:xfrm>
+            <a:off x="10043707" y="5890278"/>
+            <a:ext cx="1301349" cy="150490"/>
+          </a:xfrm>
+          <a:prstGeom prst="rect">
+            <a:avLst/>
+          </a:prstGeom>
+        </p:spPr>
+        <p:txBody>
+          <a:bodyPr wrap="square">
+            <a:spAutoFit/>
+          </a:bodyPr>
+          <a:lstStyle/>
+          <a:p>
+            <a:pPr algn="r"/>
+            <a:r>
+              <a:rPr lang="en-US" sz="378" dirty="0"/>
+              <a:t>https://</a:t>
+            </a:r>
+            <a:r>
+              <a:rPr lang="en-US" sz="378" dirty="0" smtClean="0"/>
+              <a:t>github.com/amelcharolinesgn2/CCNA-1-v7</a:t>
+            </a:r>
+            <a:endParaRPr lang="en-US" sz="378" dirty="0"/>
+          </a:p>
+        </p:txBody>
+      </p:sp>
+      <p:sp>
+        <p:nvSpPr>
+          <p:cNvPr id="33" name="Rectangle 32"/>
+          <p:cNvSpPr/>
+          <p:nvPr/>
+        </p:nvSpPr>
+        <p:spPr>
+          <a:xfrm>
+            <a:off x="10043707" y="5951958"/>
+            <a:ext cx="1301349" cy="150490"/>
+          </a:xfrm>
+          <a:prstGeom prst="rect">
+            <a:avLst/>
+          </a:prstGeom>
+        </p:spPr>
+        <p:txBody>
+          <a:bodyPr wrap="square">
+            <a:spAutoFit/>
+          </a:bodyPr>
+          <a:lstStyle/>
+          <a:p>
+            <a:pPr algn="r"/>
+            <a:r>
+              <a:rPr lang="en-US" sz="378" dirty="0"/>
+              <a:t>https://</a:t>
+            </a:r>
+            <a:r>
+              <a:rPr lang="en-US" sz="378" dirty="0" smtClean="0"/>
+              <a:t>github.com/amelcharolinesgn2/CCNA-2-v7</a:t>
+            </a:r>
+            <a:endParaRPr lang="en-US" sz="378" dirty="0"/>
+          </a:p>
+        </p:txBody>
+      </p:sp>
+      <p:sp>
+        <p:nvSpPr>
+          <p:cNvPr id="34" name="Rectangle 33"/>
+          <p:cNvSpPr/>
+          <p:nvPr/>
+        </p:nvSpPr>
+        <p:spPr>
+          <a:xfrm>
+            <a:off x="10044829" y="6207846"/>
+            <a:ext cx="1301349" cy="208647"/>
+          </a:xfrm>
+          <a:prstGeom prst="rect">
+            <a:avLst/>
+          </a:prstGeom>
+        </p:spPr>
+        <p:txBody>
+          <a:bodyPr wrap="square">
+            <a:spAutoFit/>
+          </a:bodyPr>
+          <a:lstStyle/>
+          <a:p>
+            <a:pPr algn="r"/>
+            <a:r>
+              <a:rPr lang="en-US" sz="378" dirty="0">
+                <a:hlinkClick r:id="rId8"/>
+              </a:rPr>
+              <a:t>https://github.com/amelcharolinesgn2/AWS</a:t>
+            </a:r>
+            <a:r>
+              <a:rPr lang="en-US" sz="378" dirty="0"/>
+              <a:t> Certificate</a:t>
+            </a:r>
+          </a:p>
+        </p:txBody>
+      </p:sp>
+      <p:sp>
+        <p:nvSpPr>
+          <p:cNvPr id="35" name="Rectangle 34"/>
+          <p:cNvSpPr/>
+          <p:nvPr/>
+        </p:nvSpPr>
+        <p:spPr>
+          <a:xfrm>
+            <a:off x="10044829" y="6266003"/>
+            <a:ext cx="1301349" cy="150490"/>
+          </a:xfrm>
+          <a:prstGeom prst="rect">
+            <a:avLst/>
+          </a:prstGeom>
+        </p:spPr>
+        <p:txBody>
+          <a:bodyPr wrap="square">
+            <a:spAutoFit/>
+          </a:bodyPr>
+          <a:lstStyle/>
+          <a:p>
+            <a:pPr algn="r"/>
+            <a:r>
+              <a:rPr lang="en-US" sz="378" dirty="0">
+                <a:hlinkClick r:id="rId8"/>
+              </a:rPr>
+              <a:t>https://</a:t>
+            </a:r>
+            <a:r>
+              <a:rPr lang="en-US" sz="378" dirty="0" smtClean="0">
+                <a:hlinkClick r:id="rId8"/>
+              </a:rPr>
+              <a:t>github.com/amelcharolinesgn2/OpenStack</a:t>
+            </a:r>
+            <a:endParaRPr lang="en-US" sz="378" dirty="0"/>
+          </a:p>
+        </p:txBody>
+      </p:sp>
+      <p:sp>
+        <p:nvSpPr>
+          <p:cNvPr id="36" name="Rectangle 35"/>
+          <p:cNvSpPr/>
+          <p:nvPr/>
+        </p:nvSpPr>
+        <p:spPr>
+          <a:xfrm>
+            <a:off x="10044268" y="6149317"/>
+            <a:ext cx="1301349" cy="150490"/>
+          </a:xfrm>
+          <a:prstGeom prst="rect">
+            <a:avLst/>
+          </a:prstGeom>
+        </p:spPr>
+        <p:txBody>
+          <a:bodyPr wrap="square">
+            <a:spAutoFit/>
+          </a:bodyPr>
+          <a:lstStyle/>
+          <a:p>
+            <a:pPr algn="r"/>
+            <a:r>
+              <a:rPr lang="en-US" sz="378" dirty="0">
+                <a:hlinkClick r:id="rId8"/>
+              </a:rPr>
+              <a:t>https://</a:t>
+            </a:r>
+            <a:r>
+              <a:rPr lang="en-US" sz="378" dirty="0" smtClean="0">
+                <a:hlinkClick r:id="rId8"/>
+              </a:rPr>
+              <a:t>github.com/amelcharolinesgn2/CloudSim</a:t>
+            </a:r>
+            <a:endParaRPr lang="en-US" sz="378" dirty="0"/>
+          </a:p>
+        </p:txBody>
+      </p:sp>
+      <p:sp>
+        <p:nvSpPr>
+          <p:cNvPr id="37" name="Rectangle 36"/>
+          <p:cNvSpPr/>
+          <p:nvPr/>
+        </p:nvSpPr>
+        <p:spPr>
+          <a:xfrm>
+            <a:off x="10043146" y="6012068"/>
+            <a:ext cx="1301349" cy="150490"/>
+          </a:xfrm>
+          <a:prstGeom prst="rect">
+            <a:avLst/>
+          </a:prstGeom>
+        </p:spPr>
+        <p:txBody>
+          <a:bodyPr wrap="square">
+            <a:spAutoFit/>
+          </a:bodyPr>
+          <a:lstStyle/>
+          <a:p>
+            <a:pPr algn="r"/>
+            <a:r>
+              <a:rPr lang="en-US" sz="378" dirty="0"/>
+              <a:t>https://</a:t>
+            </a:r>
+            <a:r>
+              <a:rPr lang="en-US" sz="378" dirty="0" smtClean="0"/>
+              <a:t>github.com/amelcharolinesgn2/CCNA-3-v7</a:t>
+            </a:r>
+            <a:endParaRPr lang="en-US" sz="378" dirty="0"/>
+          </a:p>
+        </p:txBody>
+      </p:sp>
+      <p:sp>
+        <p:nvSpPr>
+          <p:cNvPr id="38" name="Rectangle 37"/>
+          <p:cNvSpPr/>
+          <p:nvPr/>
+        </p:nvSpPr>
+        <p:spPr>
+          <a:xfrm>
+            <a:off x="10043146" y="6061002"/>
+            <a:ext cx="1301349" cy="150490"/>
+          </a:xfrm>
+          <a:prstGeom prst="rect">
+            <a:avLst/>
+          </a:prstGeom>
+        </p:spPr>
+        <p:txBody>
+          <a:bodyPr wrap="square">
+            <a:spAutoFit/>
+          </a:bodyPr>
+          <a:lstStyle/>
+          <a:p>
+            <a:pPr algn="r"/>
+            <a:r>
+              <a:rPr lang="en-US" sz="378" dirty="0"/>
+              <a:t>https://</a:t>
+            </a:r>
+            <a:r>
+              <a:rPr lang="en-US" sz="378" dirty="0" smtClean="0"/>
+              <a:t>github.com/amelcharolinesgn2/CCNA-4-v7</a:t>
+            </a:r>
+            <a:endParaRPr lang="en-US" sz="378" dirty="0"/>
+          </a:p>
+        </p:txBody>
+      </p:sp>
+      <p:sp>
+        <p:nvSpPr>
+          <p:cNvPr id="39" name="Rectangle 38"/>
+          <p:cNvSpPr/>
+          <p:nvPr/>
+        </p:nvSpPr>
+        <p:spPr>
+          <a:xfrm>
+            <a:off x="9926465" y="6108743"/>
+            <a:ext cx="1408890" cy="150490"/>
+          </a:xfrm>
+          <a:prstGeom prst="rect">
+            <a:avLst/>
+          </a:prstGeom>
+        </p:spPr>
+        <p:txBody>
+          <a:bodyPr wrap="square">
+            <a:spAutoFit/>
+          </a:bodyPr>
+          <a:lstStyle/>
+          <a:p>
+            <a:pPr algn="r"/>
+            <a:r>
+              <a:rPr lang="en-US" sz="378" dirty="0"/>
+              <a:t>https://</a:t>
+            </a:r>
+            <a:r>
+              <a:rPr lang="en-US" sz="378" dirty="0" smtClean="0"/>
+              <a:t>github.com/amelcharolinesgn2/ANJAR_CCNP_Lab</a:t>
+            </a:r>
+            <a:endParaRPr lang="en-US" sz="378" dirty="0"/>
           </a:p>
         </p:txBody>
       </p:sp>
@@ -7277,7 +7540,6 @@
               <a:rPr lang="en-US" b="1" dirty="0"/>
               <a:t>: Application Example</a:t>
             </a:r>
-            <a:endParaRPr lang="en-US" b="1" dirty="0"/>
           </a:p>
         </p:txBody>
       </p:sp>
@@ -8611,7 +8873,6 @@
               <a:rPr lang="en-US" b="1" dirty="0"/>
               <a:t>A simpler Docker Approach</a:t>
             </a:r>
-            <a:endParaRPr lang="en-US" b="1" dirty="0"/>
           </a:p>
         </p:txBody>
       </p:sp>
